--- a/m7/diapositivos/sessao-04-m7-f34.pptx
+++ b/m7/diapositivos/sessao-04-m7-f34.pptx
@@ -2408,7 +2408,41 @@
                 <a:ea typeface="Arial" pitchFamily="34" charset="-122"/>
                 <a:cs typeface="Arial" pitchFamily="34" charset="-120"/>
               </a:rPr>
-              <a:t>«Chuva Oblíqua» (Orpheu 2, 1915) cruza dois planos no mesmo verso: é o interseccionismo, uma dupla exposição feita de palavras.</a:t>
+              <a:t>«Chuva Oblíqua» (</a:t>
+            </a:r>
+            <a:pPr indent="0" marL="0">
+              <a:lnSpc>
+                <a:spcPct val="105000"/>
+              </a:lnSpc>
+              <a:buNone/>
+            </a:pPr>
+            <a:r>
+              <a:rPr lang="en-US" sz="2200" i="1" dirty="0">
+                <a:solidFill>
+                  <a:srgbClr val="F2F0EA"/>
+                </a:solidFill>
+                <a:latin typeface="Arial" pitchFamily="34" charset="0"/>
+                <a:ea typeface="Arial" pitchFamily="34" charset="-122"/>
+                <a:cs typeface="Arial" pitchFamily="34" charset="-120"/>
+              </a:rPr>
+              <a:t>Orpheu</a:t>
+            </a:r>
+            <a:pPr indent="0" marL="0">
+              <a:lnSpc>
+                <a:spcPct val="105000"/>
+              </a:lnSpc>
+              <a:buNone/>
+            </a:pPr>
+            <a:r>
+              <a:rPr lang="en-US" sz="2200" dirty="0">
+                <a:solidFill>
+                  <a:srgbClr val="F2F0EA"/>
+                </a:solidFill>
+                <a:latin typeface="Arial" pitchFamily="34" charset="0"/>
+                <a:ea typeface="Arial" pitchFamily="34" charset="-122"/>
+                <a:cs typeface="Arial" pitchFamily="34" charset="-120"/>
+              </a:rPr>
+              <a:t> 2, 1915) cruza dois planos no mesmo verso: é o interseccionismo, uma dupla exposição feita de palavras.</a:t>
             </a:r>
             <a:endParaRPr lang="en-US" sz="2200" dirty="0"/>
           </a:p>
@@ -6083,7 +6117,41 @@
                 <a:ea typeface="Arial" pitchFamily="34" charset="-122"/>
                 <a:cs typeface="Arial" pitchFamily="34" charset="-120"/>
               </a:rPr>
-              <a:t>«Chuva Oblíqua» saiu no Orpheu 2, em 1915, como «poemas interseccionistas»: o que o poeta vê e o que sonha cruzam-se no mesmo verso.</a:t>
+              <a:t>«Chuva Oblíqua» saiu no </a:t>
+            </a:r>
+            <a:pPr indent="0" marL="0">
+              <a:lnSpc>
+                <a:spcPct val="105000"/>
+              </a:lnSpc>
+              <a:buNone/>
+            </a:pPr>
+            <a:r>
+              <a:rPr lang="en-US" sz="2200" i="1" dirty="0">
+                <a:solidFill>
+                  <a:srgbClr val="F2F0EA"/>
+                </a:solidFill>
+                <a:latin typeface="Arial" pitchFamily="34" charset="0"/>
+                <a:ea typeface="Arial" pitchFamily="34" charset="-122"/>
+                <a:cs typeface="Arial" pitchFamily="34" charset="-120"/>
+              </a:rPr>
+              <a:t>Orpheu</a:t>
+            </a:r>
+            <a:pPr indent="0" marL="0">
+              <a:lnSpc>
+                <a:spcPct val="105000"/>
+              </a:lnSpc>
+              <a:buNone/>
+            </a:pPr>
+            <a:r>
+              <a:rPr lang="en-US" sz="2200" dirty="0">
+                <a:solidFill>
+                  <a:srgbClr val="F2F0EA"/>
+                </a:solidFill>
+                <a:latin typeface="Arial" pitchFamily="34" charset="0"/>
+                <a:ea typeface="Arial" pitchFamily="34" charset="-122"/>
+                <a:cs typeface="Arial" pitchFamily="34" charset="-120"/>
+              </a:rPr>
+              <a:t> 2, em 1915, como «poemas interseccionistas»: o que o poeta vê e o que sonha cruzam-se no mesmo verso.</a:t>
             </a:r>
             <a:endParaRPr lang="en-US" sz="2200" dirty="0"/>
           </a:p>

--- a/m7/diapositivos/sessao-04-m7-f34.pptx
+++ b/m7/diapositivos/sessao-04-m7-f34.pptx
@@ -870,7 +870,7 @@
                 <a:ea typeface="Arial" pitchFamily="34" charset="-122"/>
                 <a:cs typeface="Arial" pitchFamily="34" charset="-120"/>
               </a:rPr>
-              <a:t>Lição M7-F34, Chuva Oblíqua</a:t>
+              <a:t>Lição M7-F34, «Chuva Oblíqua»</a:t>
             </a:r>
             <a:endParaRPr lang="en-US" sz="1000" dirty="0"/>
           </a:p>
@@ -1028,7 +1028,7 @@
                 <a:ea typeface="Arial" pitchFamily="34" charset="-122"/>
                 <a:cs typeface="Arial" pitchFamily="34" charset="-120"/>
               </a:rPr>
-              <a:t>Chuva Oblíqua</a:t>
+              <a:t>«Chuva Oblíqua»</a:t>
             </a:r>
             <a:endParaRPr lang="en-US" sz="4000" dirty="0"/>
           </a:p>
@@ -1398,7 +1398,7 @@
                 <a:ea typeface="Arial" pitchFamily="34" charset="-122"/>
                 <a:cs typeface="Arial" pitchFamily="34" charset="-120"/>
               </a:rPr>
-              <a:t>Lição M7-F34, Chuva Oblíqua</a:t>
+              <a:t>Lição M7-F34, «Chuva Oblíqua»</a:t>
             </a:r>
             <a:endParaRPr lang="en-US" sz="1000" dirty="0"/>
           </a:p>
@@ -2111,7 +2111,7 @@
                 <a:ea typeface="Arial" pitchFamily="34" charset="-122"/>
                 <a:cs typeface="Arial" pitchFamily="34" charset="-120"/>
               </a:rPr>
-              <a:t>Lição M7-F34, Chuva Oblíqua</a:t>
+              <a:t>Lição M7-F34, «Chuva Oblíqua»</a:t>
             </a:r>
             <a:endParaRPr lang="en-US" sz="1000" dirty="0"/>
           </a:p>
@@ -2768,7 +2768,7 @@
                 <a:ea typeface="Arial" pitchFamily="34" charset="-122"/>
                 <a:cs typeface="Arial" pitchFamily="34" charset="-120"/>
               </a:rPr>
-              <a:t>Lição M7-F34, Chuva Oblíqua</a:t>
+              <a:t>Lição M7-F34, «Chuva Oblíqua»</a:t>
             </a:r>
             <a:endParaRPr lang="en-US" sz="1000" dirty="0"/>
           </a:p>
@@ -3481,7 +3481,7 @@
                 <a:ea typeface="Arial" pitchFamily="34" charset="-122"/>
                 <a:cs typeface="Arial" pitchFamily="34" charset="-120"/>
               </a:rPr>
-              <a:t>Lição M7-F34, Chuva Oblíqua</a:t>
+              <a:t>Lição M7-F34, «Chuva Oblíqua»</a:t>
             </a:r>
             <a:endParaRPr lang="en-US" sz="1000" dirty="0"/>
           </a:p>
@@ -3760,7 +3760,7 @@
                 <a:ea typeface="Arial" pitchFamily="34" charset="-122"/>
                 <a:cs typeface="Arial" pitchFamily="34" charset="-120"/>
               </a:rPr>
-              <a:t>Lição M7-F34, Chuva Oblíqua</a:t>
+              <a:t>Lição M7-F34, «Chuva Oblíqua»</a:t>
             </a:r>
             <a:endParaRPr lang="en-US" sz="1000" dirty="0"/>
           </a:p>
@@ -4130,7 +4130,63 @@
                 <a:ea typeface="Arial" pitchFamily="34" charset="-122"/>
                 <a:cs typeface="Arial" pitchFamily="34" charset="-120"/>
               </a:rPr>
-              <a:t>Fernando Pessoa, Orpheu n.º 2, abril a junho de 1915, Projeto Gutenberg, e-book 23621 (grafia atualizada)</a:t>
+              <a:t>Fernando Pessoa, </a:t>
+            </a:r>
+            <a:pPr indent="0" marL="0">
+              <a:buNone/>
+            </a:pPr>
+            <a:r>
+              <a:rPr lang="en-US" sz="1200" i="1" dirty="0">
+                <a:solidFill>
+                  <a:srgbClr val="A9A79F"/>
+                </a:solidFill>
+                <a:latin typeface="Arial" pitchFamily="34" charset="0"/>
+                <a:ea typeface="Arial" pitchFamily="34" charset="-122"/>
+                <a:cs typeface="Arial" pitchFamily="34" charset="-120"/>
+              </a:rPr>
+              <a:t>Orpheu</a:t>
+            </a:r>
+            <a:pPr indent="0" marL="0">
+              <a:buNone/>
+            </a:pPr>
+            <a:r>
+              <a:rPr lang="en-US" sz="1200" dirty="0">
+                <a:solidFill>
+                  <a:srgbClr val="A9A79F"/>
+                </a:solidFill>
+                <a:latin typeface="Arial" pitchFamily="34" charset="0"/>
+                <a:ea typeface="Arial" pitchFamily="34" charset="-122"/>
+                <a:cs typeface="Arial" pitchFamily="34" charset="-120"/>
+              </a:rPr>
+              <a:t> n.º 2, abril a junho de 1915, Projeto Gutenberg, </a:t>
+            </a:r>
+            <a:pPr indent="0" marL="0">
+              <a:buNone/>
+            </a:pPr>
+            <a:r>
+              <a:rPr lang="en-US" sz="1200" i="1" dirty="0">
+                <a:solidFill>
+                  <a:srgbClr val="A9A79F"/>
+                </a:solidFill>
+                <a:latin typeface="Arial" pitchFamily="34" charset="0"/>
+                <a:ea typeface="Arial" pitchFamily="34" charset="-122"/>
+                <a:cs typeface="Arial" pitchFamily="34" charset="-120"/>
+              </a:rPr>
+              <a:t>e-book</a:t>
+            </a:r>
+            <a:pPr indent="0" marL="0">
+              <a:buNone/>
+            </a:pPr>
+            <a:r>
+              <a:rPr lang="en-US" sz="1200" dirty="0">
+                <a:solidFill>
+                  <a:srgbClr val="A9A79F"/>
+                </a:solidFill>
+                <a:latin typeface="Arial" pitchFamily="34" charset="0"/>
+                <a:ea typeface="Arial" pitchFamily="34" charset="-122"/>
+                <a:cs typeface="Arial" pitchFamily="34" charset="-120"/>
+              </a:rPr>
+              <a:t> 23621 (grafia atualizada)</a:t>
             </a:r>
             <a:endParaRPr lang="en-US" sz="1200" dirty="0"/>
           </a:p>
@@ -4240,7 +4296,7 @@
                 <a:ea typeface="Arial" pitchFamily="34" charset="-122"/>
                 <a:cs typeface="Arial" pitchFamily="34" charset="-120"/>
               </a:rPr>
-              <a:t>Lição M7-F34, Chuva Oblíqua</a:t>
+              <a:t>Lição M7-F34, «Chuva Oblíqua»</a:t>
             </a:r>
             <a:endParaRPr lang="en-US" sz="1000" dirty="0"/>
           </a:p>
@@ -4730,7 +4786,63 @@
                 <a:ea typeface="Arial" pitchFamily="34" charset="-122"/>
                 <a:cs typeface="Arial" pitchFamily="34" charset="-120"/>
               </a:rPr>
-              <a:t>Fernando Pessoa, Orpheu n.º 2, abril a junho de 1915, Projeto Gutenberg, e-book 23621 (grafia atualizada)</a:t>
+              <a:t>Fernando Pessoa, </a:t>
+            </a:r>
+            <a:pPr indent="0" marL="0">
+              <a:buNone/>
+            </a:pPr>
+            <a:r>
+              <a:rPr lang="en-US" sz="1200" i="1" dirty="0">
+                <a:solidFill>
+                  <a:srgbClr val="A9A79F"/>
+                </a:solidFill>
+                <a:latin typeface="Arial" pitchFamily="34" charset="0"/>
+                <a:ea typeface="Arial" pitchFamily="34" charset="-122"/>
+                <a:cs typeface="Arial" pitchFamily="34" charset="-120"/>
+              </a:rPr>
+              <a:t>Orpheu</a:t>
+            </a:r>
+            <a:pPr indent="0" marL="0">
+              <a:buNone/>
+            </a:pPr>
+            <a:r>
+              <a:rPr lang="en-US" sz="1200" dirty="0">
+                <a:solidFill>
+                  <a:srgbClr val="A9A79F"/>
+                </a:solidFill>
+                <a:latin typeface="Arial" pitchFamily="34" charset="0"/>
+                <a:ea typeface="Arial" pitchFamily="34" charset="-122"/>
+                <a:cs typeface="Arial" pitchFamily="34" charset="-120"/>
+              </a:rPr>
+              <a:t> n.º 2, abril a junho de 1915, Projeto Gutenberg, </a:t>
+            </a:r>
+            <a:pPr indent="0" marL="0">
+              <a:buNone/>
+            </a:pPr>
+            <a:r>
+              <a:rPr lang="en-US" sz="1200" i="1" dirty="0">
+                <a:solidFill>
+                  <a:srgbClr val="A9A79F"/>
+                </a:solidFill>
+                <a:latin typeface="Arial" pitchFamily="34" charset="0"/>
+                <a:ea typeface="Arial" pitchFamily="34" charset="-122"/>
+                <a:cs typeface="Arial" pitchFamily="34" charset="-120"/>
+              </a:rPr>
+              <a:t>e-book</a:t>
+            </a:r>
+            <a:pPr indent="0" marL="0">
+              <a:buNone/>
+            </a:pPr>
+            <a:r>
+              <a:rPr lang="en-US" sz="1200" dirty="0">
+                <a:solidFill>
+                  <a:srgbClr val="A9A79F"/>
+                </a:solidFill>
+                <a:latin typeface="Arial" pitchFamily="34" charset="0"/>
+                <a:ea typeface="Arial" pitchFamily="34" charset="-122"/>
+                <a:cs typeface="Arial" pitchFamily="34" charset="-120"/>
+              </a:rPr>
+              <a:t> 23621 (grafia atualizada)</a:t>
             </a:r>
             <a:endParaRPr lang="en-US" sz="1200" dirty="0"/>
           </a:p>
@@ -4840,7 +4952,7 @@
                 <a:ea typeface="Arial" pitchFamily="34" charset="-122"/>
                 <a:cs typeface="Arial" pitchFamily="34" charset="-120"/>
               </a:rPr>
-              <a:t>Lição M7-F34, Chuva Oblíqua</a:t>
+              <a:t>Lição M7-F34, «Chuva Oblíqua»</a:t>
             </a:r>
             <a:endParaRPr lang="en-US" sz="1000" dirty="0"/>
           </a:p>
@@ -5230,7 +5342,63 @@
                 <a:ea typeface="Arial" pitchFamily="34" charset="-122"/>
                 <a:cs typeface="Arial" pitchFamily="34" charset="-120"/>
               </a:rPr>
-              <a:t>Fernando Pessoa, Orpheu n.º 2, abril a junho de 1915, Projeto Gutenberg, e-book 23621 (grafia atualizada)</a:t>
+              <a:t>Fernando Pessoa, </a:t>
+            </a:r>
+            <a:pPr indent="0" marL="0">
+              <a:buNone/>
+            </a:pPr>
+            <a:r>
+              <a:rPr lang="en-US" sz="1200" i="1" dirty="0">
+                <a:solidFill>
+                  <a:srgbClr val="A9A79F"/>
+                </a:solidFill>
+                <a:latin typeface="Arial" pitchFamily="34" charset="0"/>
+                <a:ea typeface="Arial" pitchFamily="34" charset="-122"/>
+                <a:cs typeface="Arial" pitchFamily="34" charset="-120"/>
+              </a:rPr>
+              <a:t>Orpheu</a:t>
+            </a:r>
+            <a:pPr indent="0" marL="0">
+              <a:buNone/>
+            </a:pPr>
+            <a:r>
+              <a:rPr lang="en-US" sz="1200" dirty="0">
+                <a:solidFill>
+                  <a:srgbClr val="A9A79F"/>
+                </a:solidFill>
+                <a:latin typeface="Arial" pitchFamily="34" charset="0"/>
+                <a:ea typeface="Arial" pitchFamily="34" charset="-122"/>
+                <a:cs typeface="Arial" pitchFamily="34" charset="-120"/>
+              </a:rPr>
+              <a:t> n.º 2, abril a junho de 1915, Projeto Gutenberg, </a:t>
+            </a:r>
+            <a:pPr indent="0" marL="0">
+              <a:buNone/>
+            </a:pPr>
+            <a:r>
+              <a:rPr lang="en-US" sz="1200" i="1" dirty="0">
+                <a:solidFill>
+                  <a:srgbClr val="A9A79F"/>
+                </a:solidFill>
+                <a:latin typeface="Arial" pitchFamily="34" charset="0"/>
+                <a:ea typeface="Arial" pitchFamily="34" charset="-122"/>
+                <a:cs typeface="Arial" pitchFamily="34" charset="-120"/>
+              </a:rPr>
+              <a:t>e-book</a:t>
+            </a:r>
+            <a:pPr indent="0" marL="0">
+              <a:buNone/>
+            </a:pPr>
+            <a:r>
+              <a:rPr lang="en-US" sz="1200" dirty="0">
+                <a:solidFill>
+                  <a:srgbClr val="A9A79F"/>
+                </a:solidFill>
+                <a:latin typeface="Arial" pitchFamily="34" charset="0"/>
+                <a:ea typeface="Arial" pitchFamily="34" charset="-122"/>
+                <a:cs typeface="Arial" pitchFamily="34" charset="-120"/>
+              </a:rPr>
+              <a:t> 23621 (grafia atualizada)</a:t>
             </a:r>
             <a:endParaRPr lang="en-US" sz="1200" dirty="0"/>
           </a:p>
@@ -5340,7 +5508,7 @@
                 <a:ea typeface="Arial" pitchFamily="34" charset="-122"/>
                 <a:cs typeface="Arial" pitchFamily="34" charset="-120"/>
               </a:rPr>
-              <a:t>Lição M7-F34, Chuva Oblíqua</a:t>
+              <a:t>Lição M7-F34, «Chuva Oblíqua»</a:t>
             </a:r>
             <a:endParaRPr lang="en-US" sz="1000" dirty="0"/>
           </a:p>
@@ -5710,7 +5878,63 @@
                 <a:ea typeface="Arial" pitchFamily="34" charset="-122"/>
                 <a:cs typeface="Arial" pitchFamily="34" charset="-120"/>
               </a:rPr>
-              <a:t>Fernando Pessoa, Orpheu n.º 2, abril a junho de 1915, Projeto Gutenberg, e-book 23621 (grafia atualizada)</a:t>
+              <a:t>Fernando Pessoa, </a:t>
+            </a:r>
+            <a:pPr indent="0" marL="0">
+              <a:buNone/>
+            </a:pPr>
+            <a:r>
+              <a:rPr lang="en-US" sz="1200" i="1" dirty="0">
+                <a:solidFill>
+                  <a:srgbClr val="A9A79F"/>
+                </a:solidFill>
+                <a:latin typeface="Arial" pitchFamily="34" charset="0"/>
+                <a:ea typeface="Arial" pitchFamily="34" charset="-122"/>
+                <a:cs typeface="Arial" pitchFamily="34" charset="-120"/>
+              </a:rPr>
+              <a:t>Orpheu</a:t>
+            </a:r>
+            <a:pPr indent="0" marL="0">
+              <a:buNone/>
+            </a:pPr>
+            <a:r>
+              <a:rPr lang="en-US" sz="1200" dirty="0">
+                <a:solidFill>
+                  <a:srgbClr val="A9A79F"/>
+                </a:solidFill>
+                <a:latin typeface="Arial" pitchFamily="34" charset="0"/>
+                <a:ea typeface="Arial" pitchFamily="34" charset="-122"/>
+                <a:cs typeface="Arial" pitchFamily="34" charset="-120"/>
+              </a:rPr>
+              <a:t> n.º 2, abril a junho de 1915, Projeto Gutenberg, </a:t>
+            </a:r>
+            <a:pPr indent="0" marL="0">
+              <a:buNone/>
+            </a:pPr>
+            <a:r>
+              <a:rPr lang="en-US" sz="1200" i="1" dirty="0">
+                <a:solidFill>
+                  <a:srgbClr val="A9A79F"/>
+                </a:solidFill>
+                <a:latin typeface="Arial" pitchFamily="34" charset="0"/>
+                <a:ea typeface="Arial" pitchFamily="34" charset="-122"/>
+                <a:cs typeface="Arial" pitchFamily="34" charset="-120"/>
+              </a:rPr>
+              <a:t>e-book</a:t>
+            </a:r>
+            <a:pPr indent="0" marL="0">
+              <a:buNone/>
+            </a:pPr>
+            <a:r>
+              <a:rPr lang="en-US" sz="1200" dirty="0">
+                <a:solidFill>
+                  <a:srgbClr val="A9A79F"/>
+                </a:solidFill>
+                <a:latin typeface="Arial" pitchFamily="34" charset="0"/>
+                <a:ea typeface="Arial" pitchFamily="34" charset="-122"/>
+                <a:cs typeface="Arial" pitchFamily="34" charset="-120"/>
+              </a:rPr>
+              <a:t> 23621 (grafia atualizada)</a:t>
             </a:r>
             <a:endParaRPr lang="en-US" sz="1200" dirty="0"/>
           </a:p>
@@ -5820,7 +6044,7 @@
                 <a:ea typeface="Arial" pitchFamily="34" charset="-122"/>
                 <a:cs typeface="Arial" pitchFamily="34" charset="-120"/>
               </a:rPr>
-              <a:t>Lição M7-F34, Chuva Oblíqua</a:t>
+              <a:t>Lição M7-F34, «Chuva Oblíqua»</a:t>
             </a:r>
             <a:endParaRPr lang="en-US" sz="1000" dirty="0"/>
           </a:p>
@@ -6477,7 +6701,7 @@
                 <a:ea typeface="Arial" pitchFamily="34" charset="-122"/>
                 <a:cs typeface="Arial" pitchFamily="34" charset="-120"/>
               </a:rPr>
-              <a:t>Lição M7-F34, Chuva Oblíqua</a:t>
+              <a:t>Lição M7-F34, «Chuva Oblíqua»</a:t>
             </a:r>
             <a:endParaRPr lang="en-US" sz="1000" dirty="0"/>
           </a:p>
@@ -7544,7 +7768,7 @@
                 <a:ea typeface="Arial" pitchFamily="34" charset="-122"/>
                 <a:cs typeface="Arial" pitchFamily="34" charset="-120"/>
               </a:rPr>
-              <a:t>Lição M7-F34, Chuva Oblíqua</a:t>
+              <a:t>Lição M7-F34, «Chuva Oblíqua»</a:t>
             </a:r>
             <a:endParaRPr lang="en-US" sz="1000" dirty="0"/>
           </a:p>
